--- a/demo_assets/Green_Campus_Demo_Deck.pptx
+++ b/demo_assets/Green_Campus_Demo_Deck.pptx
@@ -3211,7 +3211,7 @@
               </a:defRPr>
             </a:pPr>
             <a:r>
-              <a:t>Demo deck and explanation guide</a:t>
+              <a:t>User guide and explanation document</a:t>
             </a:r>
           </a:p>
         </p:txBody>
